--- a/Animations/Animation_AggressiveMode.pptx
+++ b/Animations/Animation_AggressiveMode.pptx
@@ -112,6 +112,35 @@
 </p:presentation>
 </file>
 
+<file path=ppt/revisionInfo.xml><?xml version="1.0" encoding="utf-8"?>
+<p1510:revInfo xmlns:a="http://schemas.openxmlformats.org/drawingml/2006/main" xmlns:r="http://schemas.openxmlformats.org/officeDocument/2006/relationships" xmlns:p1510="http://schemas.microsoft.com/office/powerpoint/2015/10/main">
+  <p1510:revLst>
+    <p1510:client id="{90C58A7D-B5D1-4DCD-AAF4-56C33FD6D954}" v="2" dt="2026-07-02T13:19:09.750"/>
+  </p1510:revLst>
+</p1510:revInfo>
+</file>
+
+<file path=ppt/changesInfos/changesInfo1.xml><?xml version="1.0" encoding="utf-8"?>
+<pc:chgInfo xmlns:a="http://schemas.openxmlformats.org/drawingml/2006/main" xmlns:r="http://schemas.openxmlformats.org/officeDocument/2006/relationships" xmlns:ac="http://schemas.microsoft.com/office/drawing/2013/main/command" xmlns:pc="http://schemas.microsoft.com/office/powerpoint/2013/main/command">
+  <pc:docChgLst>
+    <pc:chgData name="Vincent Wong" userId="53bf0ec3be892de2" providerId="LiveId" clId="{AA280CCD-9A37-4036-B579-4893E3256BFA}"/>
+    <pc:docChg chg="modSld">
+      <pc:chgData name="Vincent Wong" userId="53bf0ec3be892de2" providerId="LiveId" clId="{AA280CCD-9A37-4036-B579-4893E3256BFA}" dt="2026-07-02T13:19:09.747" v="1"/>
+      <pc:docMkLst>
+        <pc:docMk/>
+      </pc:docMkLst>
+      <pc:sldChg chg="modAnim">
+        <pc:chgData name="Vincent Wong" userId="53bf0ec3be892de2" providerId="LiveId" clId="{AA280CCD-9A37-4036-B579-4893E3256BFA}" dt="2026-07-02T13:19:09.747" v="1"/>
+        <pc:sldMkLst>
+          <pc:docMk/>
+          <pc:sldMk cId="2453880144" sldId="257"/>
+        </pc:sldMkLst>
+      </pc:sldChg>
+    </pc:docChg>
+  </pc:docChgLst>
+</pc:chgInfo>
+</file>
+
 <file path=ppt/slideLayouts/slideLayout1.xml><?xml version="1.0" encoding="utf-8"?>
 <p:sldLayout xmlns:a="http://schemas.openxmlformats.org/drawingml/2006/main" xmlns:r="http://schemas.openxmlformats.org/officeDocument/2006/relationships" xmlns:p="http://schemas.openxmlformats.org/presentationml/2006/main" type="title" preserve="1">
   <p:cSld name="Title Slide">
@@ -261,7 +290,7 @@
           <a:p>
             <a:fld id="{D75296B4-54F5-4C95-842A-5037F717EE0B}" type="datetimeFigureOut">
               <a:rPr lang="en-HK" smtClean="0"/>
-              <a:t>10/3/2022</a:t>
+              <a:t>2/7/2026</a:t>
             </a:fld>
             <a:endParaRPr lang="en-HK"/>
           </a:p>
@@ -461,7 +490,7 @@
           <a:p>
             <a:fld id="{D75296B4-54F5-4C95-842A-5037F717EE0B}" type="datetimeFigureOut">
               <a:rPr lang="en-HK" smtClean="0"/>
-              <a:t>10/3/2022</a:t>
+              <a:t>2/7/2026</a:t>
             </a:fld>
             <a:endParaRPr lang="en-HK"/>
           </a:p>
@@ -671,7 +700,7 @@
           <a:p>
             <a:fld id="{D75296B4-54F5-4C95-842A-5037F717EE0B}" type="datetimeFigureOut">
               <a:rPr lang="en-HK" smtClean="0"/>
-              <a:t>10/3/2022</a:t>
+              <a:t>2/7/2026</a:t>
             </a:fld>
             <a:endParaRPr lang="en-HK"/>
           </a:p>
@@ -871,7 +900,7 @@
           <a:p>
             <a:fld id="{D75296B4-54F5-4C95-842A-5037F717EE0B}" type="datetimeFigureOut">
               <a:rPr lang="en-HK" smtClean="0"/>
-              <a:t>10/3/2022</a:t>
+              <a:t>2/7/2026</a:t>
             </a:fld>
             <a:endParaRPr lang="en-HK"/>
           </a:p>
@@ -1147,7 +1176,7 @@
           <a:p>
             <a:fld id="{D75296B4-54F5-4C95-842A-5037F717EE0B}" type="datetimeFigureOut">
               <a:rPr lang="en-HK" smtClean="0"/>
-              <a:t>10/3/2022</a:t>
+              <a:t>2/7/2026</a:t>
             </a:fld>
             <a:endParaRPr lang="en-HK"/>
           </a:p>
@@ -1415,7 +1444,7 @@
           <a:p>
             <a:fld id="{D75296B4-54F5-4C95-842A-5037F717EE0B}" type="datetimeFigureOut">
               <a:rPr lang="en-HK" smtClean="0"/>
-              <a:t>10/3/2022</a:t>
+              <a:t>2/7/2026</a:t>
             </a:fld>
             <a:endParaRPr lang="en-HK"/>
           </a:p>
@@ -1830,7 +1859,7 @@
           <a:p>
             <a:fld id="{D75296B4-54F5-4C95-842A-5037F717EE0B}" type="datetimeFigureOut">
               <a:rPr lang="en-HK" smtClean="0"/>
-              <a:t>10/3/2022</a:t>
+              <a:t>2/7/2026</a:t>
             </a:fld>
             <a:endParaRPr lang="en-HK"/>
           </a:p>
@@ -1972,7 +2001,7 @@
           <a:p>
             <a:fld id="{D75296B4-54F5-4C95-842A-5037F717EE0B}" type="datetimeFigureOut">
               <a:rPr lang="en-HK" smtClean="0"/>
-              <a:t>10/3/2022</a:t>
+              <a:t>2/7/2026</a:t>
             </a:fld>
             <a:endParaRPr lang="en-HK"/>
           </a:p>
@@ -2085,7 +2114,7 @@
           <a:p>
             <a:fld id="{D75296B4-54F5-4C95-842A-5037F717EE0B}" type="datetimeFigureOut">
               <a:rPr lang="en-HK" smtClean="0"/>
-              <a:t>10/3/2022</a:t>
+              <a:t>2/7/2026</a:t>
             </a:fld>
             <a:endParaRPr lang="en-HK"/>
           </a:p>
@@ -2398,7 +2427,7 @@
           <a:p>
             <a:fld id="{D75296B4-54F5-4C95-842A-5037F717EE0B}" type="datetimeFigureOut">
               <a:rPr lang="en-HK" smtClean="0"/>
-              <a:t>10/3/2022</a:t>
+              <a:t>2/7/2026</a:t>
             </a:fld>
             <a:endParaRPr lang="en-HK"/>
           </a:p>
@@ -2687,7 +2716,7 @@
           <a:p>
             <a:fld id="{D75296B4-54F5-4C95-842A-5037F717EE0B}" type="datetimeFigureOut">
               <a:rPr lang="en-HK" smtClean="0"/>
-              <a:t>10/3/2022</a:t>
+              <a:t>2/7/2026</a:t>
             </a:fld>
             <a:endParaRPr lang="en-HK"/>
           </a:p>
@@ -2930,7 +2959,7 @@
           <a:p>
             <a:fld id="{D75296B4-54F5-4C95-842A-5037F717EE0B}" type="datetimeFigureOut">
               <a:rPr lang="en-HK" smtClean="0"/>
-              <a:t>10/3/2022</a:t>
+              <a:t>2/7/2026</a:t>
             </a:fld>
             <a:endParaRPr lang="en-HK"/>
           </a:p>
@@ -4443,7 +4472,7 @@
                                     <p:cond delay="0"/>
                                   </p:stCondLst>
                                   <p:childTnLst>
-                                    <p:animMotion origin="layout" path="M 2.08333E-7 -4.44444E-6 L -1.26094 -4.44444E-6 " pathEditMode="relative" rAng="0" ptsTypes="AA">
+                                    <p:animMotion origin="layout" path="M 2.08333E-7 -4.44444E-6 L -1.51732 -4.44444E-6 " pathEditMode="relative" rAng="0" ptsTypes="AA">
                                       <p:cBhvr>
                                         <p:cTn id="6" dur="3000" fill="hold"/>
                                         <p:tgtEl>
@@ -4454,7 +4483,7 @@
                                           <p:attrName>ppt_y</p:attrName>
                                         </p:attrNameLst>
                                       </p:cBhvr>
-                                      <p:rCtr x="-63047" y="0"/>
+                                      <p:rCtr x="-75872" y="0"/>
                                     </p:animMotion>
                                   </p:childTnLst>
                                 </p:cTn>
